--- a/docs/vkr/Презентация.pptx
+++ b/docs/vkr/Презентация.pptx
@@ -225,7 +225,7 @@
           <a:p>
             <a:fld id="{543EA1C0-6CFA-44CF-A81D-3CC8C79A6319}" type="datetimeFigureOut">
               <a:rPr lang="ru-RU" smtClean="0"/>
-              <a:t>12.04.2026</a:t>
+              <a:t>16.05.2026</a:t>
             </a:fld>
             <a:endParaRPr lang="ru-RU"/>
           </a:p>
@@ -758,7 +758,7 @@
           <a:p>
             <a:fld id="{ABD338A3-B5FA-4892-8782-04A8FAC2DE2D}" type="datetime1">
               <a:rPr lang="ru-RU" smtClean="0"/>
-              <a:t>12.04.2026</a:t>
+              <a:t>16.05.2026</a:t>
             </a:fld>
             <a:endParaRPr lang="ru-RU"/>
           </a:p>
@@ -959,7 +959,7 @@
           <a:p>
             <a:fld id="{E45DF212-0581-4804-9196-08E59AD85A60}" type="datetime1">
               <a:rPr lang="ru-RU" smtClean="0"/>
-              <a:t>12.04.2026</a:t>
+              <a:t>16.05.2026</a:t>
             </a:fld>
             <a:endParaRPr lang="ru-RU"/>
           </a:p>
@@ -1170,7 +1170,7 @@
           <a:p>
             <a:fld id="{85A33102-27BA-4101-BD19-C265B43D1861}" type="datetime1">
               <a:rPr lang="ru-RU" smtClean="0"/>
-              <a:t>12.04.2026</a:t>
+              <a:t>16.05.2026</a:t>
             </a:fld>
             <a:endParaRPr lang="ru-RU"/>
           </a:p>
@@ -1406,7 +1406,7 @@
           <a:p>
             <a:fld id="{FA39DC75-0073-477D-B85F-B87BD2D9AA66}" type="datetime1">
               <a:rPr lang="ru-RU" smtClean="0"/>
-              <a:t>12.04.2026</a:t>
+              <a:t>16.05.2026</a:t>
             </a:fld>
             <a:endParaRPr lang="ru-RU"/>
           </a:p>
@@ -1696,7 +1696,7 @@
           <a:p>
             <a:fld id="{3826988C-DC8F-439B-AB31-15A4297BC55F}" type="datetime1">
               <a:rPr lang="ru-RU" smtClean="0"/>
-              <a:t>12.04.2026</a:t>
+              <a:t>16.05.2026</a:t>
             </a:fld>
             <a:endParaRPr lang="ru-RU"/>
           </a:p>
@@ -1964,7 +1964,7 @@
           <a:p>
             <a:fld id="{1FA422C7-A0AF-4B73-A3E0-92773191928A}" type="datetime1">
               <a:rPr lang="ru-RU" smtClean="0"/>
-              <a:t>12.04.2026</a:t>
+              <a:t>16.05.2026</a:t>
             </a:fld>
             <a:endParaRPr lang="ru-RU"/>
           </a:p>
@@ -2379,7 +2379,7 @@
           <a:p>
             <a:fld id="{AE075EF7-06F9-47F2-ABB5-15A865F5A607}" type="datetime1">
               <a:rPr lang="ru-RU" smtClean="0"/>
-              <a:t>12.04.2026</a:t>
+              <a:t>16.05.2026</a:t>
             </a:fld>
             <a:endParaRPr lang="ru-RU"/>
           </a:p>
@@ -2523,7 +2523,7 @@
           <a:p>
             <a:fld id="{18133A35-A3AC-4FD5-9F62-E2E842F797D6}" type="datetime1">
               <a:rPr lang="ru-RU" smtClean="0"/>
-              <a:t>12.04.2026</a:t>
+              <a:t>16.05.2026</a:t>
             </a:fld>
             <a:endParaRPr lang="ru-RU"/>
           </a:p>
@@ -2639,7 +2639,7 @@
           <a:p>
             <a:fld id="{C75FB44B-5874-4EB6-914B-68491120A420}" type="datetime1">
               <a:rPr lang="ru-RU" smtClean="0"/>
-              <a:t>12.04.2026</a:t>
+              <a:t>16.05.2026</a:t>
             </a:fld>
             <a:endParaRPr lang="ru-RU"/>
           </a:p>
@@ -2953,7 +2953,7 @@
           <a:p>
             <a:fld id="{DC59103B-4E77-49D0-9E40-D0F96ACD7E42}" type="datetime1">
               <a:rPr lang="ru-RU" smtClean="0"/>
-              <a:t>12.04.2026</a:t>
+              <a:t>16.05.2026</a:t>
             </a:fld>
             <a:endParaRPr lang="ru-RU"/>
           </a:p>
@@ -3244,7 +3244,7 @@
           <a:p>
             <a:fld id="{7F0F4974-916B-4771-921F-D6B7309972A3}" type="datetime1">
               <a:rPr lang="ru-RU" smtClean="0"/>
-              <a:t>12.04.2026</a:t>
+              <a:t>16.05.2026</a:t>
             </a:fld>
             <a:endParaRPr lang="ru-RU"/>
           </a:p>
@@ -3517,7 +3517,7 @@
           <a:p>
             <a:fld id="{2732E4CB-F021-4DE4-87F8-062D97973001}" type="datetime1">
               <a:rPr lang="ru-RU" smtClean="0"/>
-              <a:t>12.04.2026</a:t>
+              <a:t>16.05.2026</a:t>
             </a:fld>
             <a:endParaRPr lang="ru-RU" dirty="0"/>
           </a:p>
@@ -4106,24 +4106,17 @@
                 <a:solidFill>
                   <a:srgbClr val="002060"/>
                 </a:solidFill>
+                <a:latin typeface="Impact" panose="020B0806030902050204" pitchFamily="34" charset="0"/>
               </a:rPr>
-              <a:t>Разработка </a:t>
-            </a:r>
-            <a:r>
-              <a:rPr lang="ru-RU" sz="3200" dirty="0" err="1">
+              <a:t>М</a:t>
+            </a:r>
+            <a:r>
+              <a:rPr lang="ru-RU" sz="3200" dirty="0">
                 <a:solidFill>
                   <a:srgbClr val="002060"/>
                 </a:solidFill>
               </a:rPr>
-              <a:t>микросервисного</a:t>
-            </a:r>
-            <a:r>
-              <a:rPr lang="ru-RU" sz="3200" dirty="0">
-                <a:solidFill>
-                  <a:srgbClr val="002060"/>
-                </a:solidFill>
-              </a:rPr>
-              <a:t> веб-приложения для управления внутренними задачами, проектами и коммуникацией команды</a:t>
+              <a:t>икросервисное веб-приложение для управления внутренними задачами, проектами и коммуникацией команды</a:t>
             </a:r>
             <a:r>
               <a:rPr lang="ru-RU" sz="3200" dirty="0">
